--- a/ai/src/ppt dataset/Blue Minimalist Project Presentation.pptx
+++ b/ai/src/ppt dataset/Blue Minimalist Project Presentation.pptx
@@ -3131,6 +3131,10 @@
             </a:stretch>
           </a:blipFill>
         </p:spPr>
+        <p:txBody>
+          <a:bodyPr/>
+          <a:p/>
+        </p:txBody>
       </p:sp>
       <p:grpSp>
         <p:nvGrpSpPr>
@@ -3325,25 +3329,7 @@
             <a:spAutoFit/>
           </a:bodyPr>
           <a:lstStyle/>
-          <a:p>
-            <a:pPr algn="ctr">
-              <a:lnSpc>
-                <a:spcPts val="10918"/>
-              </a:lnSpc>
-            </a:pPr>
-            <a:r>
-              <a:rPr lang="en-US" b="true" sz="12998" spc="-701">
-                <a:solidFill>
-                  <a:srgbClr val="1C2120"/>
-                </a:solidFill>
-                <a:latin typeface="Poppins Semi-Bold"/>
-                <a:ea typeface="Poppins Semi-Bold"/>
-                <a:cs typeface="Poppins Semi-Bold"/>
-                <a:sym typeface="Poppins Semi-Bold"/>
-              </a:rPr>
-              <a:t>PROJECT PRESENTATION</a:t>
-            </a:r>
-          </a:p>
+          <a:p/>
         </p:txBody>
       </p:sp>
       <p:sp>
@@ -3366,25 +3352,7 @@
             <a:spAutoFit/>
           </a:bodyPr>
           <a:lstStyle/>
-          <a:p>
-            <a:pPr algn="ctr">
-              <a:lnSpc>
-                <a:spcPts val="3445"/>
-              </a:lnSpc>
-            </a:pPr>
-            <a:r>
-              <a:rPr lang="en-US" sz="3445" spc="-68">
-                <a:solidFill>
-                  <a:srgbClr val="1C2120"/>
-                </a:solidFill>
-                <a:latin typeface="Poppins"/>
-                <a:ea typeface="Poppins"/>
-                <a:cs typeface="Poppins"/>
-                <a:sym typeface="Poppins"/>
-              </a:rPr>
-              <a:t>PRESENTED BY HELENE PAQUET</a:t>
-            </a:r>
-          </a:p>
+          <a:p/>
         </p:txBody>
       </p:sp>
     </p:spTree>
@@ -3439,25 +3407,7 @@
             <a:spAutoFit/>
           </a:bodyPr>
           <a:lstStyle/>
-          <a:p>
-            <a:pPr algn="ctr">
-              <a:lnSpc>
-                <a:spcPts val="10460"/>
-              </a:lnSpc>
-            </a:pPr>
-            <a:r>
-              <a:rPr lang="en-US" b="true" sz="12023">
-                <a:solidFill>
-                  <a:srgbClr val="1C2120"/>
-                </a:solidFill>
-                <a:latin typeface="Poppins Bold"/>
-                <a:ea typeface="Poppins Bold"/>
-                <a:cs typeface="Poppins Bold"/>
-                <a:sym typeface="Poppins Bold"/>
-              </a:rPr>
-              <a:t>Thank you very much!</a:t>
-            </a:r>
-          </a:p>
+          <a:p/>
         </p:txBody>
       </p:sp>
       <p:grpSp>
@@ -3569,25 +3519,7 @@
             <a:spAutoFit/>
           </a:bodyPr>
           <a:lstStyle/>
-          <a:p>
-            <a:pPr algn="ctr">
-              <a:lnSpc>
-                <a:spcPts val="3445"/>
-              </a:lnSpc>
-            </a:pPr>
-            <a:r>
-              <a:rPr lang="en-US" sz="3445" spc="-68">
-                <a:solidFill>
-                  <a:srgbClr val="1C2120"/>
-                </a:solidFill>
-                <a:latin typeface="Poppins"/>
-                <a:ea typeface="Poppins"/>
-                <a:cs typeface="Poppins"/>
-                <a:sym typeface="Poppins"/>
-              </a:rPr>
-              <a:t>PRESENTED BY HELENE PAQUET</a:t>
-            </a:r>
-          </a:p>
+          <a:p/>
         </p:txBody>
       </p:sp>
     </p:spTree>
@@ -3660,6 +3592,10 @@
             </a:stretch>
           </a:blipFill>
         </p:spPr>
+        <p:txBody>
+          <a:bodyPr/>
+          <a:p/>
+        </p:txBody>
       </p:sp>
       <p:grpSp>
         <p:nvGrpSpPr>
@@ -3890,25 +3826,7 @@
             <a:spAutoFit/>
           </a:bodyPr>
           <a:lstStyle/>
-          <a:p>
-            <a:pPr algn="l">
-              <a:lnSpc>
-                <a:spcPts val="7935"/>
-              </a:lnSpc>
-            </a:pPr>
-            <a:r>
-              <a:rPr lang="en-US" sz="8180" b="true">
-                <a:solidFill>
-                  <a:srgbClr val="1C2120"/>
-                </a:solidFill>
-                <a:latin typeface="Poppins Bold"/>
-                <a:ea typeface="Poppins Bold"/>
-                <a:cs typeface="Poppins Bold"/>
-                <a:sym typeface="Poppins Bold"/>
-              </a:rPr>
-              <a:t>Origin of the creative idea</a:t>
-            </a:r>
-          </a:p>
+          <a:p/>
         </p:txBody>
       </p:sp>
       <p:sp>
@@ -3931,60 +3849,7 @@
             <a:spAutoFit/>
           </a:bodyPr>
           <a:lstStyle/>
-          <a:p>
-            <a:pPr algn="l" marL="0" indent="0" lvl="0">
-              <a:lnSpc>
-                <a:spcPts val="2454"/>
-              </a:lnSpc>
-              <a:spcBef>
-                <a:spcPct val="0"/>
-              </a:spcBef>
-            </a:pPr>
-            <a:r>
-              <a:rPr lang="en-US" sz="1817" spc="109" u="none">
-                <a:solidFill>
-                  <a:srgbClr val="000000"/>
-                </a:solidFill>
-                <a:latin typeface="DM Sans"/>
-                <a:ea typeface="DM Sans"/>
-                <a:cs typeface="DM Sans"/>
-                <a:sym typeface="DM Sans"/>
-              </a:rPr>
-              <a:t>Lorem ipsum dolor sit amet, consectetur adipiscing elit, sed do eiusmod tempor incididunt ut labore et dolore magna aliqua. Ut enim ad minim veniam, quis nostrud exercitation ullamco laboris nisi ut aliquip ex ea commodo consequat.</a:t>
-            </a:r>
-          </a:p>
-          <a:p>
-            <a:pPr algn="l" marL="0" indent="0" lvl="0">
-              <a:lnSpc>
-                <a:spcPts val="2454"/>
-              </a:lnSpc>
-              <a:spcBef>
-                <a:spcPct val="0"/>
-              </a:spcBef>
-            </a:pPr>
-          </a:p>
-          <a:p>
-            <a:pPr algn="l" marL="0" indent="0" lvl="0">
-              <a:lnSpc>
-                <a:spcPts val="2454"/>
-              </a:lnSpc>
-              <a:spcBef>
-                <a:spcPct val="0"/>
-              </a:spcBef>
-            </a:pPr>
-            <a:r>
-              <a:rPr lang="en-US" sz="1817" spc="109" u="none">
-                <a:solidFill>
-                  <a:srgbClr val="000000"/>
-                </a:solidFill>
-                <a:latin typeface="DM Sans"/>
-                <a:ea typeface="DM Sans"/>
-                <a:cs typeface="DM Sans"/>
-                <a:sym typeface="DM Sans"/>
-              </a:rPr>
-              <a:t>Duis aute irure dolor in reprehenderit in voluptate velit esse cillum dolore eu fugiat nulla pariatur. Excepteur sint occaecat cupidatat non proident, sunt in culpa qui officia deserunt mollit anim id est laborum.</a:t>
-            </a:r>
-          </a:p>
+          <a:p/>
         </p:txBody>
       </p:sp>
       <p:sp>
@@ -4007,25 +3872,7 @@
             <a:spAutoFit/>
           </a:bodyPr>
           <a:lstStyle/>
-          <a:p>
-            <a:pPr algn="ctr">
-              <a:lnSpc>
-                <a:spcPts val="2365"/>
-              </a:lnSpc>
-            </a:pPr>
-            <a:r>
-              <a:rPr lang="en-US" sz="2190">
-                <a:solidFill>
-                  <a:srgbClr val="1C2120"/>
-                </a:solidFill>
-                <a:latin typeface="Poppins"/>
-                <a:ea typeface="Poppins"/>
-                <a:cs typeface="Poppins"/>
-                <a:sym typeface="Poppins"/>
-              </a:rPr>
-              <a:t>Exploring creativity</a:t>
-            </a:r>
-          </a:p>
+          <a:p/>
         </p:txBody>
       </p:sp>
     </p:spTree>
@@ -4219,6 +4066,10 @@
             </a:stretch>
           </a:blipFill>
         </p:spPr>
+        <p:txBody>
+          <a:bodyPr/>
+          <a:p/>
+        </p:txBody>
       </p:sp>
       <p:grpSp>
         <p:nvGrpSpPr>
@@ -4501,6 +4352,10 @@
             </a:stretch>
           </a:blipFill>
         </p:spPr>
+        <p:txBody>
+          <a:bodyPr/>
+          <a:p/>
+        </p:txBody>
       </p:sp>
       <p:sp>
         <p:nvSpPr>
@@ -4553,6 +4408,10 @@
             </a:stretch>
           </a:blipFill>
         </p:spPr>
+        <p:txBody>
+          <a:bodyPr/>
+          <a:p/>
+        </p:txBody>
       </p:sp>
       <p:sp>
         <p:nvSpPr>
@@ -4574,25 +4433,7 @@
             <a:spAutoFit/>
           </a:bodyPr>
           <a:lstStyle/>
-          <a:p>
-            <a:pPr algn="l">
-              <a:lnSpc>
-                <a:spcPts val="9658"/>
-              </a:lnSpc>
-            </a:pPr>
-            <a:r>
-              <a:rPr lang="en-US" sz="8472" b="true">
-                <a:solidFill>
-                  <a:srgbClr val="1C2120"/>
-                </a:solidFill>
-                <a:latin typeface="Poppins Bold"/>
-                <a:ea typeface="Poppins Bold"/>
-                <a:cs typeface="Poppins Bold"/>
-                <a:sym typeface="Poppins Bold"/>
-              </a:rPr>
-              <a:t>Project vision and mission</a:t>
-            </a:r>
-          </a:p>
+          <a:p/>
         </p:txBody>
       </p:sp>
       <p:sp>
@@ -4615,28 +4456,7 @@
             <a:spAutoFit/>
           </a:bodyPr>
           <a:lstStyle/>
-          <a:p>
-            <a:pPr algn="l" marL="0" indent="0" lvl="0">
-              <a:lnSpc>
-                <a:spcPts val="2541"/>
-              </a:lnSpc>
-              <a:spcBef>
-                <a:spcPct val="0"/>
-              </a:spcBef>
-            </a:pPr>
-            <a:r>
-              <a:rPr lang="en-US" sz="1882" spc="112" u="none">
-                <a:solidFill>
-                  <a:srgbClr val="000000"/>
-                </a:solidFill>
-                <a:latin typeface="DM Sans"/>
-                <a:ea typeface="DM Sans"/>
-                <a:cs typeface="DM Sans"/>
-                <a:sym typeface="DM Sans"/>
-              </a:rPr>
-              <a:t>Lorem ipsum dolor sit amet, consectetur adipiscing elit, sed do eiusmod tempor incididunt ut labore et dolore magna aliqua. Ut enim ad minim veniam, quis nostrud exercitation ullamco laboris nisi ut aliquip ex ea commodo consequat.</a:t>
-            </a:r>
-          </a:p>
+          <a:p/>
         </p:txBody>
       </p:sp>
       <p:sp>
@@ -4659,28 +4479,7 @@
             <a:spAutoFit/>
           </a:bodyPr>
           <a:lstStyle/>
-          <a:p>
-            <a:pPr algn="just" marL="0" indent="0" lvl="0">
-              <a:lnSpc>
-                <a:spcPts val="1770"/>
-              </a:lnSpc>
-              <a:spcBef>
-                <a:spcPct val="0"/>
-              </a:spcBef>
-            </a:pPr>
-            <a:r>
-              <a:rPr lang="en-US" sz="1311" spc="20" u="none">
-                <a:solidFill>
-                  <a:srgbClr val="1C2120"/>
-                </a:solidFill>
-                <a:latin typeface="DM Sans"/>
-                <a:ea typeface="DM Sans"/>
-                <a:cs typeface="DM Sans"/>
-                <a:sym typeface="DM Sans"/>
-              </a:rPr>
-              <a:t>Lorem ipsum dolor sit amet, consectetur adipiscing elit, sed do eiusmod tempor incididunt ut labore et dolore magna aliqua. Ut enim ad minim veniam</a:t>
-            </a:r>
-          </a:p>
+          <a:p/>
         </p:txBody>
       </p:sp>
       <p:sp>
@@ -4703,28 +4502,7 @@
             <a:spAutoFit/>
           </a:bodyPr>
           <a:lstStyle/>
-          <a:p>
-            <a:pPr algn="just" marL="0" indent="0" lvl="0">
-              <a:lnSpc>
-                <a:spcPts val="1770"/>
-              </a:lnSpc>
-              <a:spcBef>
-                <a:spcPct val="0"/>
-              </a:spcBef>
-            </a:pPr>
-            <a:r>
-              <a:rPr lang="en-US" sz="1311" spc="20" u="none">
-                <a:solidFill>
-                  <a:srgbClr val="1C2120"/>
-                </a:solidFill>
-                <a:latin typeface="DM Sans"/>
-                <a:ea typeface="DM Sans"/>
-                <a:cs typeface="DM Sans"/>
-                <a:sym typeface="DM Sans"/>
-              </a:rPr>
-              <a:t>Lorem ipsum dolor sit amet, consectetur adipiscing elit, sed do eiusmod tempor incididunt ut labore et dolore magna aliqua. Ut enim ad minim veniam</a:t>
-            </a:r>
-          </a:p>
+          <a:p/>
         </p:txBody>
       </p:sp>
       <p:sp>
@@ -4747,28 +4525,7 @@
             <a:spAutoFit/>
           </a:bodyPr>
           <a:lstStyle/>
-          <a:p>
-            <a:pPr algn="just" marL="0" indent="0" lvl="0">
-              <a:lnSpc>
-                <a:spcPts val="1770"/>
-              </a:lnSpc>
-              <a:spcBef>
-                <a:spcPct val="0"/>
-              </a:spcBef>
-            </a:pPr>
-            <a:r>
-              <a:rPr lang="en-US" sz="1311" spc="20" u="none">
-                <a:solidFill>
-                  <a:srgbClr val="1C2120"/>
-                </a:solidFill>
-                <a:latin typeface="DM Sans"/>
-                <a:ea typeface="DM Sans"/>
-                <a:cs typeface="DM Sans"/>
-                <a:sym typeface="DM Sans"/>
-              </a:rPr>
-              <a:t>Lorem ipsum dolor sit amet, consectetur adipiscing elit, sed do eiusmod tempor incididunt ut labore et dolore magna aliqua. Ut enim ad minim veniam</a:t>
-            </a:r>
-          </a:p>
+          <a:p/>
         </p:txBody>
       </p:sp>
       <p:sp>
@@ -4794,6 +4551,10 @@
             <a:tailEnd type="none" len="sm" w="sm"/>
           </a:ln>
         </p:spPr>
+        <p:txBody>
+          <a:bodyPr/>
+          <a:p/>
+        </p:txBody>
       </p:sp>
       <p:sp>
         <p:nvSpPr>
@@ -4818,6 +4579,10 @@
             <a:tailEnd type="none" len="sm" w="sm"/>
           </a:ln>
         </p:spPr>
+        <p:txBody>
+          <a:bodyPr/>
+          <a:p/>
+        </p:txBody>
       </p:sp>
       <p:sp>
         <p:nvSpPr>
@@ -4842,6 +4607,10 @@
             <a:tailEnd type="none" len="sm" w="sm"/>
           </a:ln>
         </p:spPr>
+        <p:txBody>
+          <a:bodyPr/>
+          <a:p/>
+        </p:txBody>
       </p:sp>
       <p:grpSp>
         <p:nvGrpSpPr>
@@ -4988,25 +4757,7 @@
             <a:spAutoFit/>
           </a:bodyPr>
           <a:lstStyle/>
-          <a:p>
-            <a:pPr algn="ctr">
-              <a:lnSpc>
-                <a:spcPts val="2365"/>
-              </a:lnSpc>
-            </a:pPr>
-            <a:r>
-              <a:rPr lang="en-US" sz="2190">
-                <a:solidFill>
-                  <a:srgbClr val="1C2120"/>
-                </a:solidFill>
-                <a:latin typeface="Poppins"/>
-                <a:ea typeface="Poppins"/>
-                <a:cs typeface="Poppins"/>
-                <a:sym typeface="Poppins"/>
-              </a:rPr>
-              <a:t>Exploring creativity</a:t>
-            </a:r>
-          </a:p>
+          <a:p/>
         </p:txBody>
       </p:sp>
     </p:spTree>
@@ -5085,6 +4836,10 @@
             </a:stretch>
           </a:blipFill>
         </p:spPr>
+        <p:txBody>
+          <a:bodyPr/>
+          <a:p/>
+        </p:txBody>
       </p:sp>
       <p:grpSp>
         <p:nvGrpSpPr>
@@ -5606,25 +5361,7 @@
             <a:spAutoFit/>
           </a:bodyPr>
           <a:lstStyle/>
-          <a:p>
-            <a:pPr algn="ctr">
-              <a:lnSpc>
-                <a:spcPts val="9049"/>
-              </a:lnSpc>
-            </a:pPr>
-            <a:r>
-              <a:rPr lang="en-US" b="true" sz="7938">
-                <a:solidFill>
-                  <a:srgbClr val="1C2120"/>
-                </a:solidFill>
-                <a:latin typeface="Poppins Bold"/>
-                <a:ea typeface="Poppins Bold"/>
-                <a:cs typeface="Poppins Bold"/>
-                <a:sym typeface="Poppins Bold"/>
-              </a:rPr>
-              <a:t>Infographic</a:t>
-            </a:r>
-          </a:p>
+          <a:p/>
         </p:txBody>
       </p:sp>
       <p:sp>
@@ -5647,25 +5384,7 @@
             <a:spAutoFit/>
           </a:bodyPr>
           <a:lstStyle/>
-          <a:p>
-            <a:pPr algn="l">
-              <a:lnSpc>
-                <a:spcPts val="8282"/>
-              </a:lnSpc>
-            </a:pPr>
-            <a:r>
-              <a:rPr lang="en-US" sz="7265" b="true">
-                <a:solidFill>
-                  <a:srgbClr val="1C2120"/>
-                </a:solidFill>
-                <a:latin typeface="Poppins Bold"/>
-                <a:ea typeface="Poppins Bold"/>
-                <a:cs typeface="Poppins Bold"/>
-                <a:sym typeface="Poppins Bold"/>
-              </a:rPr>
-              <a:t>70k</a:t>
-            </a:r>
-          </a:p>
+          <a:p/>
         </p:txBody>
       </p:sp>
       <p:sp>
@@ -5688,25 +5407,7 @@
             <a:spAutoFit/>
           </a:bodyPr>
           <a:lstStyle/>
-          <a:p>
-            <a:pPr algn="ctr">
-              <a:lnSpc>
-                <a:spcPts val="2033"/>
-              </a:lnSpc>
-            </a:pPr>
-            <a:r>
-              <a:rPr lang="en-US" sz="1883">
-                <a:solidFill>
-                  <a:srgbClr val="1C2120"/>
-                </a:solidFill>
-                <a:latin typeface="Poppins"/>
-                <a:ea typeface="Poppins"/>
-                <a:cs typeface="Poppins"/>
-                <a:sym typeface="Poppins"/>
-              </a:rPr>
-              <a:t>Management</a:t>
-            </a:r>
-          </a:p>
+          <a:p/>
         </p:txBody>
       </p:sp>
       <p:sp>
@@ -5729,28 +5430,7 @@
             <a:spAutoFit/>
           </a:bodyPr>
           <a:lstStyle/>
-          <a:p>
-            <a:pPr algn="l" marL="0" indent="0" lvl="0">
-              <a:lnSpc>
-                <a:spcPts val="2541"/>
-              </a:lnSpc>
-              <a:spcBef>
-                <a:spcPct val="0"/>
-              </a:spcBef>
-            </a:pPr>
-            <a:r>
-              <a:rPr lang="en-US" sz="1882" spc="112" u="none">
-                <a:solidFill>
-                  <a:srgbClr val="000000"/>
-                </a:solidFill>
-                <a:latin typeface="DM Sans"/>
-                <a:ea typeface="DM Sans"/>
-                <a:cs typeface="DM Sans"/>
-                <a:sym typeface="DM Sans"/>
-              </a:rPr>
-              <a:t>Lorem ipsum dolor sit amet, consectetur adipiscing elit, sed do eiusmod tempor </a:t>
-            </a:r>
-          </a:p>
+          <a:p/>
         </p:txBody>
       </p:sp>
       <p:sp>
@@ -5773,25 +5453,7 @@
             <a:spAutoFit/>
           </a:bodyPr>
           <a:lstStyle/>
-          <a:p>
-            <a:pPr algn="l">
-              <a:lnSpc>
-                <a:spcPts val="8282"/>
-              </a:lnSpc>
-            </a:pPr>
-            <a:r>
-              <a:rPr lang="en-US" sz="7265" b="true">
-                <a:solidFill>
-                  <a:srgbClr val="1C2120"/>
-                </a:solidFill>
-                <a:latin typeface="Poppins Bold"/>
-                <a:ea typeface="Poppins Bold"/>
-                <a:cs typeface="Poppins Bold"/>
-                <a:sym typeface="Poppins Bold"/>
-              </a:rPr>
-              <a:t>70k</a:t>
-            </a:r>
-          </a:p>
+          <a:p/>
         </p:txBody>
       </p:sp>
       <p:sp>
@@ -5814,25 +5476,7 @@
             <a:spAutoFit/>
           </a:bodyPr>
           <a:lstStyle/>
-          <a:p>
-            <a:pPr algn="ctr">
-              <a:lnSpc>
-                <a:spcPts val="2033"/>
-              </a:lnSpc>
-            </a:pPr>
-            <a:r>
-              <a:rPr lang="en-US" sz="1883">
-                <a:solidFill>
-                  <a:srgbClr val="1C2120"/>
-                </a:solidFill>
-                <a:latin typeface="Poppins"/>
-                <a:ea typeface="Poppins"/>
-                <a:cs typeface="Poppins"/>
-                <a:sym typeface="Poppins"/>
-              </a:rPr>
-              <a:t>Management</a:t>
-            </a:r>
-          </a:p>
+          <a:p/>
         </p:txBody>
       </p:sp>
       <p:sp>
@@ -5855,28 +5499,7 @@
             <a:spAutoFit/>
           </a:bodyPr>
           <a:lstStyle/>
-          <a:p>
-            <a:pPr algn="l" marL="0" indent="0" lvl="0">
-              <a:lnSpc>
-                <a:spcPts val="2541"/>
-              </a:lnSpc>
-              <a:spcBef>
-                <a:spcPct val="0"/>
-              </a:spcBef>
-            </a:pPr>
-            <a:r>
-              <a:rPr lang="en-US" sz="1882" spc="112" u="none">
-                <a:solidFill>
-                  <a:srgbClr val="000000"/>
-                </a:solidFill>
-                <a:latin typeface="DM Sans"/>
-                <a:ea typeface="DM Sans"/>
-                <a:cs typeface="DM Sans"/>
-                <a:sym typeface="DM Sans"/>
-              </a:rPr>
-              <a:t>Lorem ipsum dolor sit amet, consectetur adipiscing elit, sed do eiusmod tempor </a:t>
-            </a:r>
-          </a:p>
+          <a:p/>
         </p:txBody>
       </p:sp>
       <p:sp>
@@ -5899,25 +5522,7 @@
             <a:spAutoFit/>
           </a:bodyPr>
           <a:lstStyle/>
-          <a:p>
-            <a:pPr algn="l">
-              <a:lnSpc>
-                <a:spcPts val="8282"/>
-              </a:lnSpc>
-            </a:pPr>
-            <a:r>
-              <a:rPr lang="en-US" sz="7265" b="true">
-                <a:solidFill>
-                  <a:srgbClr val="1C2120"/>
-                </a:solidFill>
-                <a:latin typeface="Poppins Bold"/>
-                <a:ea typeface="Poppins Bold"/>
-                <a:cs typeface="Poppins Bold"/>
-                <a:sym typeface="Poppins Bold"/>
-              </a:rPr>
-              <a:t>70k</a:t>
-            </a:r>
-          </a:p>
+          <a:p/>
         </p:txBody>
       </p:sp>
       <p:sp>
@@ -5940,25 +5545,7 @@
             <a:spAutoFit/>
           </a:bodyPr>
           <a:lstStyle/>
-          <a:p>
-            <a:pPr algn="ctr">
-              <a:lnSpc>
-                <a:spcPts val="2033"/>
-              </a:lnSpc>
-            </a:pPr>
-            <a:r>
-              <a:rPr lang="en-US" sz="1883">
-                <a:solidFill>
-                  <a:srgbClr val="1C2120"/>
-                </a:solidFill>
-                <a:latin typeface="Poppins"/>
-                <a:ea typeface="Poppins"/>
-                <a:cs typeface="Poppins"/>
-                <a:sym typeface="Poppins"/>
-              </a:rPr>
-              <a:t>Management</a:t>
-            </a:r>
-          </a:p>
+          <a:p/>
         </p:txBody>
       </p:sp>
       <p:sp>
@@ -5981,28 +5568,7 @@
             <a:spAutoFit/>
           </a:bodyPr>
           <a:lstStyle/>
-          <a:p>
-            <a:pPr algn="l" marL="0" indent="0" lvl="0">
-              <a:lnSpc>
-                <a:spcPts val="2541"/>
-              </a:lnSpc>
-              <a:spcBef>
-                <a:spcPct val="0"/>
-              </a:spcBef>
-            </a:pPr>
-            <a:r>
-              <a:rPr lang="en-US" sz="1882" spc="112" u="none">
-                <a:solidFill>
-                  <a:srgbClr val="000000"/>
-                </a:solidFill>
-                <a:latin typeface="DM Sans"/>
-                <a:ea typeface="DM Sans"/>
-                <a:cs typeface="DM Sans"/>
-                <a:sym typeface="DM Sans"/>
-              </a:rPr>
-              <a:t>Lorem ipsum dolor sit amet, consectetur adipiscing elit, sed do eiusmod tempor </a:t>
-            </a:r>
-          </a:p>
+          <a:p/>
         </p:txBody>
       </p:sp>
       <p:sp>
@@ -6025,25 +5591,7 @@
             <a:spAutoFit/>
           </a:bodyPr>
           <a:lstStyle/>
-          <a:p>
-            <a:pPr algn="l">
-              <a:lnSpc>
-                <a:spcPts val="8282"/>
-              </a:lnSpc>
-            </a:pPr>
-            <a:r>
-              <a:rPr lang="en-US" sz="7265" b="true">
-                <a:solidFill>
-                  <a:srgbClr val="1C2120"/>
-                </a:solidFill>
-                <a:latin typeface="Poppins Bold"/>
-                <a:ea typeface="Poppins Bold"/>
-                <a:cs typeface="Poppins Bold"/>
-                <a:sym typeface="Poppins Bold"/>
-              </a:rPr>
-              <a:t>70k</a:t>
-            </a:r>
-          </a:p>
+          <a:p/>
         </p:txBody>
       </p:sp>
       <p:sp>
@@ -6066,25 +5614,7 @@
             <a:spAutoFit/>
           </a:bodyPr>
           <a:lstStyle/>
-          <a:p>
-            <a:pPr algn="ctr">
-              <a:lnSpc>
-                <a:spcPts val="2033"/>
-              </a:lnSpc>
-            </a:pPr>
-            <a:r>
-              <a:rPr lang="en-US" sz="1883">
-                <a:solidFill>
-                  <a:srgbClr val="1C2120"/>
-                </a:solidFill>
-                <a:latin typeface="Poppins"/>
-                <a:ea typeface="Poppins"/>
-                <a:cs typeface="Poppins"/>
-                <a:sym typeface="Poppins"/>
-              </a:rPr>
-              <a:t>Management</a:t>
-            </a:r>
-          </a:p>
+          <a:p/>
         </p:txBody>
       </p:sp>
       <p:sp>
@@ -6107,28 +5637,7 @@
             <a:spAutoFit/>
           </a:bodyPr>
           <a:lstStyle/>
-          <a:p>
-            <a:pPr algn="l" marL="0" indent="0" lvl="0">
-              <a:lnSpc>
-                <a:spcPts val="2541"/>
-              </a:lnSpc>
-              <a:spcBef>
-                <a:spcPct val="0"/>
-              </a:spcBef>
-            </a:pPr>
-            <a:r>
-              <a:rPr lang="en-US" sz="1882" spc="112" u="none">
-                <a:solidFill>
-                  <a:srgbClr val="000000"/>
-                </a:solidFill>
-                <a:latin typeface="DM Sans"/>
-                <a:ea typeface="DM Sans"/>
-                <a:cs typeface="DM Sans"/>
-                <a:sym typeface="DM Sans"/>
-              </a:rPr>
-              <a:t>Lorem ipsum dolor sit amet, consectetur adipiscing elit, sed do eiusmod tempor </a:t>
-            </a:r>
-          </a:p>
+          <a:p/>
         </p:txBody>
       </p:sp>
     </p:spTree>
@@ -6648,6 +6157,10 @@
             </a:stretch>
           </a:blipFill>
         </p:spPr>
+        <p:txBody>
+          <a:bodyPr/>
+          <a:p/>
+        </p:txBody>
       </p:sp>
       <p:sp>
         <p:nvSpPr>
@@ -6700,6 +6213,10 @@
             </a:stretch>
           </a:blipFill>
         </p:spPr>
+        <p:txBody>
+          <a:bodyPr/>
+          <a:p/>
+        </p:txBody>
       </p:sp>
       <p:sp>
         <p:nvSpPr>
@@ -6752,6 +6269,10 @@
             </a:stretch>
           </a:blipFill>
         </p:spPr>
+        <p:txBody>
+          <a:bodyPr/>
+          <a:p/>
+        </p:txBody>
       </p:sp>
       <p:sp>
         <p:nvSpPr>
@@ -6804,6 +6325,10 @@
             </a:stretch>
           </a:blipFill>
         </p:spPr>
+        <p:txBody>
+          <a:bodyPr/>
+          <a:p/>
+        </p:txBody>
       </p:sp>
       <p:sp>
         <p:nvSpPr>
@@ -6825,25 +6350,7 @@
             <a:spAutoFit/>
           </a:bodyPr>
           <a:lstStyle/>
-          <a:p>
-            <a:pPr algn="l">
-              <a:lnSpc>
-                <a:spcPts val="9658"/>
-              </a:lnSpc>
-            </a:pPr>
-            <a:r>
-              <a:rPr lang="en-US" sz="8472" b="true">
-                <a:solidFill>
-                  <a:srgbClr val="1C2120"/>
-                </a:solidFill>
-                <a:latin typeface="Poppins Bold"/>
-                <a:ea typeface="Poppins Bold"/>
-                <a:cs typeface="Poppins Bold"/>
-                <a:sym typeface="Poppins Bold"/>
-              </a:rPr>
-              <a:t>Our Process</a:t>
-            </a:r>
-          </a:p>
+          <a:p/>
         </p:txBody>
       </p:sp>
       <p:sp>
@@ -6866,28 +6373,7 @@
             <a:spAutoFit/>
           </a:bodyPr>
           <a:lstStyle/>
-          <a:p>
-            <a:pPr algn="l" marL="0" indent="0" lvl="0">
-              <a:lnSpc>
-                <a:spcPts val="2541"/>
-              </a:lnSpc>
-              <a:spcBef>
-                <a:spcPct val="0"/>
-              </a:spcBef>
-            </a:pPr>
-            <a:r>
-              <a:rPr lang="en-US" sz="1882" spc="112" u="none">
-                <a:solidFill>
-                  <a:srgbClr val="000000"/>
-                </a:solidFill>
-                <a:latin typeface="DM Sans"/>
-                <a:ea typeface="DM Sans"/>
-                <a:cs typeface="DM Sans"/>
-                <a:sym typeface="DM Sans"/>
-              </a:rPr>
-              <a:t>Lorem ipsum dolor sit amet, consectetur adipiscing elit, sed do eiusmod tempor incididunt ut labore et dolore magna aliqua. Ut enim ad minim veniam, quis nostrud exercitation ullamco laboris nisi ut aliquip ex ea commodo consequat.</a:t>
-            </a:r>
-          </a:p>
+          <a:p/>
         </p:txBody>
       </p:sp>
       <p:grpSp>
@@ -7035,25 +6521,7 @@
             <a:spAutoFit/>
           </a:bodyPr>
           <a:lstStyle/>
-          <a:p>
-            <a:pPr algn="ctr">
-              <a:lnSpc>
-                <a:spcPts val="2365"/>
-              </a:lnSpc>
-            </a:pPr>
-            <a:r>
-              <a:rPr lang="en-US" sz="2190">
-                <a:solidFill>
-                  <a:srgbClr val="1C2120"/>
-                </a:solidFill>
-                <a:latin typeface="Poppins"/>
-                <a:ea typeface="Poppins"/>
-                <a:cs typeface="Poppins"/>
-                <a:sym typeface="Poppins"/>
-              </a:rPr>
-              <a:t>Exploring creativity</a:t>
-            </a:r>
-          </a:p>
+          <a:p/>
         </p:txBody>
       </p:sp>
     </p:spTree>
@@ -7412,6 +6880,10 @@
             </a:stretch>
           </a:blipFill>
         </p:spPr>
+        <p:txBody>
+          <a:bodyPr/>
+          <a:p/>
+        </p:txBody>
       </p:sp>
       <p:sp>
         <p:nvSpPr>
@@ -7433,28 +6905,7 @@
             <a:spAutoFit/>
           </a:bodyPr>
           <a:lstStyle/>
-          <a:p>
-            <a:pPr algn="just" marL="0" indent="0" lvl="0">
-              <a:lnSpc>
-                <a:spcPts val="1479"/>
-              </a:lnSpc>
-              <a:spcBef>
-                <a:spcPct val="0"/>
-              </a:spcBef>
-            </a:pPr>
-            <a:r>
-              <a:rPr lang="en-US" sz="1096" spc="17" u="none">
-                <a:solidFill>
-                  <a:srgbClr val="1C2120"/>
-                </a:solidFill>
-                <a:latin typeface="DM Sans"/>
-                <a:ea typeface="DM Sans"/>
-                <a:cs typeface="DM Sans"/>
-                <a:sym typeface="DM Sans"/>
-              </a:rPr>
-              <a:t>Lorem ipsum dolor sit amet, consectetur adipiscing elit, sed do eiusmod tempor incididunt ut labore et dolore magna aliqua. Ut enim ad minim veniam</a:t>
-            </a:r>
-          </a:p>
+          <a:p/>
         </p:txBody>
       </p:sp>
       <p:sp>
@@ -7477,25 +6928,7 @@
             <a:spAutoFit/>
           </a:bodyPr>
           <a:lstStyle/>
-          <a:p>
-            <a:pPr algn="l">
-              <a:lnSpc>
-                <a:spcPts val="1894"/>
-              </a:lnSpc>
-            </a:pPr>
-            <a:r>
-              <a:rPr lang="en-US" sz="1754" b="true">
-                <a:solidFill>
-                  <a:srgbClr val="1C2120"/>
-                </a:solidFill>
-                <a:latin typeface="Poppins Bold"/>
-                <a:ea typeface="Poppins Bold"/>
-                <a:cs typeface="Poppins Bold"/>
-                <a:sym typeface="Poppins Bold"/>
-              </a:rPr>
-              <a:t>Exploring creativity</a:t>
-            </a:r>
-          </a:p>
+          <a:p/>
         </p:txBody>
       </p:sp>
       <p:sp>
@@ -7549,6 +6982,10 @@
             </a:stretch>
           </a:blipFill>
         </p:spPr>
+        <p:txBody>
+          <a:bodyPr/>
+          <a:p/>
+        </p:txBody>
       </p:sp>
       <p:sp>
         <p:nvSpPr>
@@ -7570,28 +7007,7 @@
             <a:spAutoFit/>
           </a:bodyPr>
           <a:lstStyle/>
-          <a:p>
-            <a:pPr algn="just" marL="0" indent="0" lvl="0">
-              <a:lnSpc>
-                <a:spcPts val="1479"/>
-              </a:lnSpc>
-              <a:spcBef>
-                <a:spcPct val="0"/>
-              </a:spcBef>
-            </a:pPr>
-            <a:r>
-              <a:rPr lang="en-US" sz="1096" spc="17" u="none">
-                <a:solidFill>
-                  <a:srgbClr val="1C2120"/>
-                </a:solidFill>
-                <a:latin typeface="DM Sans"/>
-                <a:ea typeface="DM Sans"/>
-                <a:cs typeface="DM Sans"/>
-                <a:sym typeface="DM Sans"/>
-              </a:rPr>
-              <a:t>Lorem ipsum dolor sit amet, consectetur adipiscing elit, sed do eiusmod tempor incididunt ut labore et dolore magna aliqua. Ut enim ad minim veniam</a:t>
-            </a:r>
-          </a:p>
+          <a:p/>
         </p:txBody>
       </p:sp>
       <p:sp>
@@ -7614,25 +7030,7 @@
             <a:spAutoFit/>
           </a:bodyPr>
           <a:lstStyle/>
-          <a:p>
-            <a:pPr algn="l">
-              <a:lnSpc>
-                <a:spcPts val="1894"/>
-              </a:lnSpc>
-            </a:pPr>
-            <a:r>
-              <a:rPr lang="en-US" sz="1754" b="true">
-                <a:solidFill>
-                  <a:srgbClr val="1C2120"/>
-                </a:solidFill>
-                <a:latin typeface="Poppins Bold"/>
-                <a:ea typeface="Poppins Bold"/>
-                <a:cs typeface="Poppins Bold"/>
-                <a:sym typeface="Poppins Bold"/>
-              </a:rPr>
-              <a:t>Exploring creativity</a:t>
-            </a:r>
-          </a:p>
+          <a:p/>
         </p:txBody>
       </p:sp>
       <p:sp>
@@ -7686,6 +7084,10 @@
             </a:stretch>
           </a:blipFill>
         </p:spPr>
+        <p:txBody>
+          <a:bodyPr/>
+          <a:p/>
+        </p:txBody>
       </p:sp>
       <p:sp>
         <p:nvSpPr>
@@ -7707,28 +7109,7 @@
             <a:spAutoFit/>
           </a:bodyPr>
           <a:lstStyle/>
-          <a:p>
-            <a:pPr algn="just" marL="0" indent="0" lvl="0">
-              <a:lnSpc>
-                <a:spcPts val="1479"/>
-              </a:lnSpc>
-              <a:spcBef>
-                <a:spcPct val="0"/>
-              </a:spcBef>
-            </a:pPr>
-            <a:r>
-              <a:rPr lang="en-US" sz="1096" spc="17" u="none">
-                <a:solidFill>
-                  <a:srgbClr val="1C2120"/>
-                </a:solidFill>
-                <a:latin typeface="DM Sans"/>
-                <a:ea typeface="DM Sans"/>
-                <a:cs typeface="DM Sans"/>
-                <a:sym typeface="DM Sans"/>
-              </a:rPr>
-              <a:t>Lorem ipsum dolor sit amet, consectetur adipiscing elit, sed do eiusmod tempor incididunt ut labore et dolore magna aliqua. Ut enim ad minim veniam</a:t>
-            </a:r>
-          </a:p>
+          <a:p/>
         </p:txBody>
       </p:sp>
       <p:sp>
@@ -7751,25 +7132,7 @@
             <a:spAutoFit/>
           </a:bodyPr>
           <a:lstStyle/>
-          <a:p>
-            <a:pPr algn="l">
-              <a:lnSpc>
-                <a:spcPts val="1894"/>
-              </a:lnSpc>
-            </a:pPr>
-            <a:r>
-              <a:rPr lang="en-US" sz="1754" b="true">
-                <a:solidFill>
-                  <a:srgbClr val="1C2120"/>
-                </a:solidFill>
-                <a:latin typeface="Poppins Bold"/>
-                <a:ea typeface="Poppins Bold"/>
-                <a:cs typeface="Poppins Bold"/>
-                <a:sym typeface="Poppins Bold"/>
-              </a:rPr>
-              <a:t>Exploring creativity</a:t>
-            </a:r>
-          </a:p>
+          <a:p/>
         </p:txBody>
       </p:sp>
       <p:sp>
@@ -7823,6 +7186,10 @@
             </a:stretch>
           </a:blipFill>
         </p:spPr>
+        <p:txBody>
+          <a:bodyPr/>
+          <a:p/>
+        </p:txBody>
       </p:sp>
       <p:sp>
         <p:nvSpPr>
@@ -7844,28 +7211,7 @@
             <a:spAutoFit/>
           </a:bodyPr>
           <a:lstStyle/>
-          <a:p>
-            <a:pPr algn="just" marL="0" indent="0" lvl="0">
-              <a:lnSpc>
-                <a:spcPts val="1479"/>
-              </a:lnSpc>
-              <a:spcBef>
-                <a:spcPct val="0"/>
-              </a:spcBef>
-            </a:pPr>
-            <a:r>
-              <a:rPr lang="en-US" sz="1096" spc="17" u="none">
-                <a:solidFill>
-                  <a:srgbClr val="1C2120"/>
-                </a:solidFill>
-                <a:latin typeface="DM Sans"/>
-                <a:ea typeface="DM Sans"/>
-                <a:cs typeface="DM Sans"/>
-                <a:sym typeface="DM Sans"/>
-              </a:rPr>
-              <a:t>Lorem ipsum dolor sit amet, consectetur adipiscing elit, sed do eiusmod tempor incididunt ut labore et dolore magna aliqua. Ut enim ad minim veniam</a:t>
-            </a:r>
-          </a:p>
+          <a:p/>
         </p:txBody>
       </p:sp>
       <p:sp>
@@ -7888,25 +7234,7 @@
             <a:spAutoFit/>
           </a:bodyPr>
           <a:lstStyle/>
-          <a:p>
-            <a:pPr algn="l">
-              <a:lnSpc>
-                <a:spcPts val="1894"/>
-              </a:lnSpc>
-            </a:pPr>
-            <a:r>
-              <a:rPr lang="en-US" sz="1754" b="true">
-                <a:solidFill>
-                  <a:srgbClr val="1C2120"/>
-                </a:solidFill>
-                <a:latin typeface="Poppins Bold"/>
-                <a:ea typeface="Poppins Bold"/>
-                <a:cs typeface="Poppins Bold"/>
-                <a:sym typeface="Poppins Bold"/>
-              </a:rPr>
-              <a:t>Exploring creativity</a:t>
-            </a:r>
-          </a:p>
+          <a:p/>
         </p:txBody>
       </p:sp>
       <p:sp>
@@ -7929,25 +7257,7 @@
             <a:spAutoFit/>
           </a:bodyPr>
           <a:lstStyle/>
-          <a:p>
-            <a:pPr algn="ctr">
-              <a:lnSpc>
-                <a:spcPts val="6596"/>
-              </a:lnSpc>
-            </a:pPr>
-            <a:r>
-              <a:rPr lang="en-US" b="true" sz="6800">
-                <a:solidFill>
-                  <a:srgbClr val="1C2120"/>
-                </a:solidFill>
-                <a:latin typeface="Poppins Bold"/>
-                <a:ea typeface="Poppins Bold"/>
-                <a:cs typeface="Poppins Bold"/>
-                <a:sym typeface="Poppins Bold"/>
-              </a:rPr>
-              <a:t>Creation process</a:t>
-            </a:r>
-          </a:p>
+          <a:p/>
         </p:txBody>
       </p:sp>
     </p:spTree>
@@ -7995,28 +7305,7 @@
             <a:spAutoFit/>
           </a:bodyPr>
           <a:lstStyle/>
-          <a:p>
-            <a:pPr algn="l" marL="0" indent="0" lvl="1">
-              <a:lnSpc>
-                <a:spcPts val="7458"/>
-              </a:lnSpc>
-              <a:spcBef>
-                <a:spcPct val="0"/>
-              </a:spcBef>
-            </a:pPr>
-            <a:r>
-              <a:rPr lang="en-US" b="true" sz="7689">
-                <a:solidFill>
-                  <a:srgbClr val="1C2120"/>
-                </a:solidFill>
-                <a:latin typeface="Poppins Bold"/>
-                <a:ea typeface="Poppins Bold"/>
-                <a:cs typeface="Poppins Bold"/>
-                <a:sym typeface="Poppins Bold"/>
-              </a:rPr>
-              <a:t>Mind map</a:t>
-            </a:r>
-          </a:p>
+          <a:p/>
         </p:txBody>
       </p:sp>
       <p:grpSp>
@@ -8144,25 +7433,7 @@
             <a:spAutoFit/>
           </a:bodyPr>
           <a:lstStyle/>
-          <a:p>
-            <a:pPr algn="ctr">
-              <a:lnSpc>
-                <a:spcPts val="3132"/>
-              </a:lnSpc>
-            </a:pPr>
-            <a:r>
-              <a:rPr lang="en-US" sz="2900">
-                <a:solidFill>
-                  <a:srgbClr val="000000"/>
-                </a:solidFill>
-                <a:latin typeface="DM Sans"/>
-                <a:ea typeface="DM Sans"/>
-                <a:cs typeface="DM Sans"/>
-                <a:sym typeface="DM Sans"/>
-              </a:rPr>
-              <a:t>Exploring creativity</a:t>
-            </a:r>
-          </a:p>
+          <a:p/>
         </p:txBody>
       </p:sp>
       <p:sp>
@@ -8185,60 +7456,7 @@
             <a:spAutoFit/>
           </a:bodyPr>
           <a:lstStyle/>
-          <a:p>
-            <a:pPr algn="l" marL="0" indent="0" lvl="0">
-              <a:lnSpc>
-                <a:spcPts val="2454"/>
-              </a:lnSpc>
-              <a:spcBef>
-                <a:spcPct val="0"/>
-              </a:spcBef>
-            </a:pPr>
-            <a:r>
-              <a:rPr lang="en-US" sz="1817" spc="109" u="none">
-                <a:solidFill>
-                  <a:srgbClr val="000000"/>
-                </a:solidFill>
-                <a:latin typeface="DM Sans"/>
-                <a:ea typeface="DM Sans"/>
-                <a:cs typeface="DM Sans"/>
-                <a:sym typeface="DM Sans"/>
-              </a:rPr>
-              <a:t>Lorem ipsum dolor sit amet, consectetur adipiscing elit, sed do eiusmod tempor incididunt ut labore et dolore magna aliqua. Ut enim ad minim veniam, quis nostrud exercitation ullamco laboris nisi ut aliquip ex ea commodo consequat.</a:t>
-            </a:r>
-          </a:p>
-          <a:p>
-            <a:pPr algn="l" marL="0" indent="0" lvl="0">
-              <a:lnSpc>
-                <a:spcPts val="2454"/>
-              </a:lnSpc>
-              <a:spcBef>
-                <a:spcPct val="0"/>
-              </a:spcBef>
-            </a:pPr>
-          </a:p>
-          <a:p>
-            <a:pPr algn="l" marL="0" indent="0" lvl="0">
-              <a:lnSpc>
-                <a:spcPts val="2454"/>
-              </a:lnSpc>
-              <a:spcBef>
-                <a:spcPct val="0"/>
-              </a:spcBef>
-            </a:pPr>
-            <a:r>
-              <a:rPr lang="en-US" sz="1817" spc="109" u="none">
-                <a:solidFill>
-                  <a:srgbClr val="000000"/>
-                </a:solidFill>
-                <a:latin typeface="DM Sans"/>
-                <a:ea typeface="DM Sans"/>
-                <a:cs typeface="DM Sans"/>
-                <a:sym typeface="DM Sans"/>
-              </a:rPr>
-              <a:t>Duis aute irure dolor in reprehenderit in voluptate velit esse cillum dolore eu fugiat nulla pariatur. Excepteur sint occaecat cupidatat non proident, sunt in culpa qui officia deserunt mollit anim id est laborum.</a:t>
-            </a:r>
-          </a:p>
+          <a:p/>
         </p:txBody>
       </p:sp>
       <p:grpSp>
@@ -8407,6 +7625,10 @@
             </a:stretch>
           </a:blipFill>
         </p:spPr>
+        <p:txBody>
+          <a:bodyPr/>
+          <a:p/>
+        </p:txBody>
       </p:sp>
       <p:grpSp>
         <p:nvGrpSpPr>
@@ -8689,6 +7911,10 @@
             </a:stretch>
           </a:blipFill>
         </p:spPr>
+        <p:txBody>
+          <a:bodyPr/>
+          <a:p/>
+        </p:txBody>
       </p:sp>
       <p:sp>
         <p:nvSpPr>
@@ -8741,6 +7967,10 @@
             </a:stretch>
           </a:blipFill>
         </p:spPr>
+        <p:txBody>
+          <a:bodyPr/>
+          <a:p/>
+        </p:txBody>
       </p:sp>
       <p:sp>
         <p:nvSpPr>
@@ -8762,28 +7992,7 @@
             <a:spAutoFit/>
           </a:bodyPr>
           <a:lstStyle/>
-          <a:p>
-            <a:pPr algn="just" marL="0" indent="0" lvl="0">
-              <a:lnSpc>
-                <a:spcPts val="1770"/>
-              </a:lnSpc>
-              <a:spcBef>
-                <a:spcPct val="0"/>
-              </a:spcBef>
-            </a:pPr>
-            <a:r>
-              <a:rPr lang="en-US" sz="1311" spc="20" u="none">
-                <a:solidFill>
-                  <a:srgbClr val="1C2120"/>
-                </a:solidFill>
-                <a:latin typeface="DM Sans"/>
-                <a:ea typeface="DM Sans"/>
-                <a:cs typeface="DM Sans"/>
-                <a:sym typeface="DM Sans"/>
-              </a:rPr>
-              <a:t>Lorem ipsum dolor sit amet, consectetur adipiscing elit, sed do eiusmod tempor incididunt ut labore et dolore magna aliqua. Ut enim ad minim veniam</a:t>
-            </a:r>
-          </a:p>
+          <a:p/>
         </p:txBody>
       </p:sp>
       <p:sp>
@@ -8806,28 +8015,7 @@
             <a:spAutoFit/>
           </a:bodyPr>
           <a:lstStyle/>
-          <a:p>
-            <a:pPr algn="just" marL="0" indent="0" lvl="0">
-              <a:lnSpc>
-                <a:spcPts val="1770"/>
-              </a:lnSpc>
-              <a:spcBef>
-                <a:spcPct val="0"/>
-              </a:spcBef>
-            </a:pPr>
-            <a:r>
-              <a:rPr lang="en-US" sz="1311" spc="20" u="none">
-                <a:solidFill>
-                  <a:srgbClr val="1C2120"/>
-                </a:solidFill>
-                <a:latin typeface="DM Sans"/>
-                <a:ea typeface="DM Sans"/>
-                <a:cs typeface="DM Sans"/>
-                <a:sym typeface="DM Sans"/>
-              </a:rPr>
-              <a:t>Lorem ipsum dolor sit amet, consectetur adipiscing elit, sed do eiusmod tempor incididunt ut labore et dolore magna aliqua. Ut enim ad minim veniam</a:t>
-            </a:r>
-          </a:p>
+          <a:p/>
         </p:txBody>
       </p:sp>
       <p:sp>
@@ -8850,28 +8038,7 @@
             <a:spAutoFit/>
           </a:bodyPr>
           <a:lstStyle/>
-          <a:p>
-            <a:pPr algn="just" marL="0" indent="0" lvl="0">
-              <a:lnSpc>
-                <a:spcPts val="1770"/>
-              </a:lnSpc>
-              <a:spcBef>
-                <a:spcPct val="0"/>
-              </a:spcBef>
-            </a:pPr>
-            <a:r>
-              <a:rPr lang="en-US" sz="1311" spc="20" u="none">
-                <a:solidFill>
-                  <a:srgbClr val="1C2120"/>
-                </a:solidFill>
-                <a:latin typeface="DM Sans"/>
-                <a:ea typeface="DM Sans"/>
-                <a:cs typeface="DM Sans"/>
-                <a:sym typeface="DM Sans"/>
-              </a:rPr>
-              <a:t>Lorem ipsum dolor sit amet, consectetur adipiscing elit, sed do eiusmod tempor incididunt ut labore et dolore magna aliqua. Ut enim ad minim veniam</a:t>
-            </a:r>
-          </a:p>
+          <a:p/>
         </p:txBody>
       </p:sp>
       <p:sp>
@@ -8897,6 +8064,10 @@
             <a:tailEnd type="none" len="sm" w="sm"/>
           </a:ln>
         </p:spPr>
+        <p:txBody>
+          <a:bodyPr/>
+          <a:p/>
+        </p:txBody>
       </p:sp>
       <p:sp>
         <p:nvSpPr>
@@ -8921,6 +8092,10 @@
             <a:tailEnd type="none" len="sm" w="sm"/>
           </a:ln>
         </p:spPr>
+        <p:txBody>
+          <a:bodyPr/>
+          <a:p/>
+        </p:txBody>
       </p:sp>
       <p:sp>
         <p:nvSpPr>
@@ -8945,6 +8120,10 @@
             <a:tailEnd type="none" len="sm" w="sm"/>
           </a:ln>
         </p:spPr>
+        <p:txBody>
+          <a:bodyPr/>
+          <a:p/>
+        </p:txBody>
       </p:sp>
     </p:spTree>
   </p:cSld>
@@ -8991,48 +8170,7 @@
             <a:spAutoFit/>
           </a:bodyPr>
           <a:lstStyle/>
-          <a:p>
-            <a:pPr algn="l" marL="0" indent="0" lvl="0">
-              <a:lnSpc>
-                <a:spcPts val="2454"/>
-              </a:lnSpc>
-              <a:spcBef>
-                <a:spcPct val="0"/>
-              </a:spcBef>
-            </a:pPr>
-            <a:r>
-              <a:rPr lang="en-US" sz="1817" spc="109" u="none">
-                <a:solidFill>
-                  <a:srgbClr val="000000"/>
-                </a:solidFill>
-                <a:latin typeface="DM Sans"/>
-                <a:ea typeface="DM Sans"/>
-                <a:cs typeface="DM Sans"/>
-                <a:sym typeface="DM Sans"/>
-              </a:rPr>
-              <a:t>Lorem ipsum dolor sit amet, consectetur adipiscing elit, sed do eiusmod tempor incididunt ut labore et dolore magna aliqua. Ut enim ad minim veniam, quis nostrud exercitation ullamco laboris nisi ut aliquip ex ea commodo consequat.</a:t>
-            </a:r>
-          </a:p>
-          <a:p>
-            <a:pPr algn="l" marL="0" indent="0" lvl="0">
-              <a:lnSpc>
-                <a:spcPts val="2454"/>
-              </a:lnSpc>
-              <a:spcBef>
-                <a:spcPct val="0"/>
-              </a:spcBef>
-            </a:pPr>
-          </a:p>
-          <a:p>
-            <a:pPr algn="l" marL="0" indent="0" lvl="0">
-              <a:lnSpc>
-                <a:spcPts val="2454"/>
-              </a:lnSpc>
-              <a:spcBef>
-                <a:spcPct val="0"/>
-              </a:spcBef>
-            </a:pPr>
-          </a:p>
+          <a:p/>
         </p:txBody>
       </p:sp>
       <p:grpSp>
@@ -9179,6 +8317,10 @@
             </a:stretch>
           </a:blipFill>
         </p:spPr>
+        <p:txBody>
+          <a:bodyPr/>
+          <a:p/>
+        </p:txBody>
       </p:sp>
       <p:grpSp>
         <p:nvGrpSpPr>
@@ -9324,6 +8466,10 @@
             </a:stretch>
           </a:blipFill>
         </p:spPr>
+        <p:txBody>
+          <a:bodyPr/>
+          <a:p/>
+        </p:txBody>
       </p:sp>
       <p:grpSp>
         <p:nvGrpSpPr>
@@ -9469,6 +8615,10 @@
             </a:stretch>
           </a:blipFill>
         </p:spPr>
+        <p:txBody>
+          <a:bodyPr/>
+          <a:p/>
+        </p:txBody>
       </p:sp>
       <p:sp>
         <p:nvSpPr>
@@ -9515,6 +8665,10 @@
             </a:stretch>
           </a:blipFill>
         </p:spPr>
+        <p:txBody>
+          <a:bodyPr/>
+          <a:p/>
+        </p:txBody>
       </p:sp>
       <p:sp>
         <p:nvSpPr>
@@ -9561,6 +8715,10 @@
             </a:stretch>
           </a:blipFill>
         </p:spPr>
+        <p:txBody>
+          <a:bodyPr/>
+          <a:p/>
+        </p:txBody>
       </p:sp>
       <p:sp>
         <p:nvSpPr>
@@ -9582,25 +8740,7 @@
             <a:spAutoFit/>
           </a:bodyPr>
           <a:lstStyle/>
-          <a:p>
-            <a:pPr algn="l">
-              <a:lnSpc>
-                <a:spcPts val="11096"/>
-              </a:lnSpc>
-            </a:pPr>
-            <a:r>
-              <a:rPr lang="en-US" sz="11439" b="true">
-                <a:solidFill>
-                  <a:srgbClr val="1C2120"/>
-                </a:solidFill>
-                <a:latin typeface="Poppins Bold"/>
-                <a:ea typeface="Poppins Bold"/>
-                <a:cs typeface="Poppins Bold"/>
-                <a:sym typeface="Poppins Bold"/>
-              </a:rPr>
-              <a:t>Mockups</a:t>
-            </a:r>
-          </a:p>
+          <a:p/>
         </p:txBody>
       </p:sp>
       <p:sp>
@@ -9623,25 +8763,7 @@
             <a:spAutoFit/>
           </a:bodyPr>
           <a:lstStyle/>
-          <a:p>
-            <a:pPr algn="ctr">
-              <a:lnSpc>
-                <a:spcPts val="3132"/>
-              </a:lnSpc>
-            </a:pPr>
-            <a:r>
-              <a:rPr lang="en-US" sz="2900">
-                <a:solidFill>
-                  <a:srgbClr val="000000"/>
-                </a:solidFill>
-                <a:latin typeface="DM Sans"/>
-                <a:ea typeface="DM Sans"/>
-                <a:cs typeface="DM Sans"/>
-                <a:sym typeface="DM Sans"/>
-              </a:rPr>
-              <a:t>Exploring creativity</a:t>
-            </a:r>
-          </a:p>
+          <a:p/>
         </p:txBody>
       </p:sp>
     </p:spTree>
@@ -9720,6 +8842,10 @@
             </a:stretch>
           </a:blipFill>
         </p:spPr>
+        <p:txBody>
+          <a:bodyPr/>
+          <a:p/>
+        </p:txBody>
       </p:sp>
       <p:grpSp>
         <p:nvGrpSpPr>
@@ -9846,25 +8972,7 @@
             <a:spAutoFit/>
           </a:bodyPr>
           <a:lstStyle/>
-          <a:p>
-            <a:pPr algn="ctr">
-              <a:lnSpc>
-                <a:spcPts val="11281"/>
-              </a:lnSpc>
-            </a:pPr>
-            <a:r>
-              <a:rPr lang="en-US" b="true" sz="11630">
-                <a:solidFill>
-                  <a:srgbClr val="1C2120"/>
-                </a:solidFill>
-                <a:latin typeface="Poppins Bold"/>
-                <a:ea typeface="Poppins Bold"/>
-                <a:cs typeface="Poppins Bold"/>
-                <a:sym typeface="Poppins Bold"/>
-              </a:rPr>
-              <a:t>S.W.O.T</a:t>
-            </a:r>
-          </a:p>
+          <a:p/>
         </p:txBody>
       </p:sp>
       <p:sp>
@@ -9887,25 +8995,7 @@
             <a:spAutoFit/>
           </a:bodyPr>
           <a:lstStyle/>
-          <a:p>
-            <a:pPr algn="l">
-              <a:lnSpc>
-                <a:spcPts val="2495"/>
-              </a:lnSpc>
-            </a:pPr>
-            <a:r>
-              <a:rPr lang="en-US" sz="2132" b="true">
-                <a:solidFill>
-                  <a:srgbClr val="000000"/>
-                </a:solidFill>
-                <a:latin typeface="Poppins Semi-Bold"/>
-                <a:ea typeface="Poppins Semi-Bold"/>
-                <a:cs typeface="Poppins Semi-Bold"/>
-                <a:sym typeface="Poppins Semi-Bold"/>
-              </a:rPr>
-              <a:t>Weaknesses</a:t>
-            </a:r>
-          </a:p>
+          <a:p/>
         </p:txBody>
       </p:sp>
       <p:sp>
@@ -9928,25 +9018,7 @@
             <a:spAutoFit/>
           </a:bodyPr>
           <a:lstStyle/>
-          <a:p>
-            <a:pPr algn="l">
-              <a:lnSpc>
-                <a:spcPts val="2495"/>
-              </a:lnSpc>
-            </a:pPr>
-            <a:r>
-              <a:rPr lang="en-US" sz="2132" b="true">
-                <a:solidFill>
-                  <a:srgbClr val="000000"/>
-                </a:solidFill>
-                <a:latin typeface="Poppins Semi-Bold"/>
-                <a:ea typeface="Poppins Semi-Bold"/>
-                <a:cs typeface="Poppins Semi-Bold"/>
-                <a:sym typeface="Poppins Semi-Bold"/>
-              </a:rPr>
-              <a:t>Threats</a:t>
-            </a:r>
-          </a:p>
+          <a:p/>
         </p:txBody>
       </p:sp>
       <p:sp>
@@ -9969,25 +9041,7 @@
             <a:spAutoFit/>
           </a:bodyPr>
           <a:lstStyle/>
-          <a:p>
-            <a:pPr algn="l">
-              <a:lnSpc>
-                <a:spcPts val="2495"/>
-              </a:lnSpc>
-            </a:pPr>
-            <a:r>
-              <a:rPr lang="en-US" sz="2132" b="true">
-                <a:solidFill>
-                  <a:srgbClr val="000000"/>
-                </a:solidFill>
-                <a:latin typeface="Poppins Semi-Bold"/>
-                <a:ea typeface="Poppins Semi-Bold"/>
-                <a:cs typeface="Poppins Semi-Bold"/>
-                <a:sym typeface="Poppins Semi-Bold"/>
-              </a:rPr>
-              <a:t>Strengths</a:t>
-            </a:r>
-          </a:p>
+          <a:p/>
         </p:txBody>
       </p:sp>
       <p:sp>
@@ -10010,25 +9064,7 @@
             <a:spAutoFit/>
           </a:bodyPr>
           <a:lstStyle/>
-          <a:p>
-            <a:pPr algn="l">
-              <a:lnSpc>
-                <a:spcPts val="2495"/>
-              </a:lnSpc>
-            </a:pPr>
-            <a:r>
-              <a:rPr lang="en-US" sz="2132" b="true">
-                <a:solidFill>
-                  <a:srgbClr val="000000"/>
-                </a:solidFill>
-                <a:latin typeface="Poppins Semi-Bold"/>
-                <a:ea typeface="Poppins Semi-Bold"/>
-                <a:cs typeface="Poppins Semi-Bold"/>
-                <a:sym typeface="Poppins Semi-Bold"/>
-              </a:rPr>
-              <a:t>Opportunities</a:t>
-            </a:r>
-          </a:p>
+          <a:p/>
         </p:txBody>
       </p:sp>
       <p:sp>
@@ -10051,25 +9087,7 @@
             <a:spAutoFit/>
           </a:bodyPr>
           <a:lstStyle/>
-          <a:p>
-            <a:pPr algn="ctr">
-              <a:lnSpc>
-                <a:spcPts val="3132"/>
-              </a:lnSpc>
-            </a:pPr>
-            <a:r>
-              <a:rPr lang="en-US" sz="2900">
-                <a:solidFill>
-                  <a:srgbClr val="000000"/>
-                </a:solidFill>
-                <a:latin typeface="DM Sans"/>
-                <a:ea typeface="DM Sans"/>
-                <a:cs typeface="DM Sans"/>
-                <a:sym typeface="DM Sans"/>
-              </a:rPr>
-              <a:t>swot analysis</a:t>
-            </a:r>
-          </a:p>
+          <a:p/>
         </p:txBody>
       </p:sp>
       <p:sp>
@@ -10092,28 +9110,7 @@
             <a:spAutoFit/>
           </a:bodyPr>
           <a:lstStyle/>
-          <a:p>
-            <a:pPr algn="just" marL="0" indent="0" lvl="0">
-              <a:lnSpc>
-                <a:spcPts val="1863"/>
-              </a:lnSpc>
-              <a:spcBef>
-                <a:spcPct val="0"/>
-              </a:spcBef>
-            </a:pPr>
-            <a:r>
-              <a:rPr lang="en-US" sz="1380" spc="82" u="none">
-                <a:solidFill>
-                  <a:srgbClr val="000000"/>
-                </a:solidFill>
-                <a:latin typeface="DM Sans"/>
-                <a:ea typeface="DM Sans"/>
-                <a:cs typeface="DM Sans"/>
-                <a:sym typeface="DM Sans"/>
-              </a:rPr>
-              <a:t>Lorem ipsum dolor sit amet, consectetur adipiscing elit, sed do eiusmod tempor incididunt ut labore et dolore magna aliqua. </a:t>
-            </a:r>
-          </a:p>
+          <a:p/>
         </p:txBody>
       </p:sp>
       <p:sp>
@@ -10136,25 +9133,7 @@
             <a:spAutoFit/>
           </a:bodyPr>
           <a:lstStyle/>
-          <a:p>
-            <a:pPr algn="l">
-              <a:lnSpc>
-                <a:spcPts val="11281"/>
-              </a:lnSpc>
-            </a:pPr>
-            <a:r>
-              <a:rPr lang="en-US" b="true" sz="11630">
-                <a:solidFill>
-                  <a:srgbClr val="1C2120"/>
-                </a:solidFill>
-                <a:latin typeface="Poppins Bold"/>
-                <a:ea typeface="Poppins Bold"/>
-                <a:cs typeface="Poppins Bold"/>
-                <a:sym typeface="Poppins Bold"/>
-              </a:rPr>
-              <a:t>S</a:t>
-            </a:r>
-          </a:p>
+          <a:p/>
         </p:txBody>
       </p:sp>
       <p:sp>
@@ -10177,28 +9156,7 @@
             <a:spAutoFit/>
           </a:bodyPr>
           <a:lstStyle/>
-          <a:p>
-            <a:pPr algn="just" marL="0" indent="0" lvl="0">
-              <a:lnSpc>
-                <a:spcPts val="1863"/>
-              </a:lnSpc>
-              <a:spcBef>
-                <a:spcPct val="0"/>
-              </a:spcBef>
-            </a:pPr>
-            <a:r>
-              <a:rPr lang="en-US" sz="1380" spc="82" u="none">
-                <a:solidFill>
-                  <a:srgbClr val="000000"/>
-                </a:solidFill>
-                <a:latin typeface="DM Sans"/>
-                <a:ea typeface="DM Sans"/>
-                <a:cs typeface="DM Sans"/>
-                <a:sym typeface="DM Sans"/>
-              </a:rPr>
-              <a:t>Lorem ipsum dolor sit amet, consectetur adipiscing elit, sed do eiusmod tempor incididunt ut labore et dolore magna aliqua. </a:t>
-            </a:r>
-          </a:p>
+          <a:p/>
         </p:txBody>
       </p:sp>
       <p:sp>
@@ -10221,28 +9179,7 @@
             <a:spAutoFit/>
           </a:bodyPr>
           <a:lstStyle/>
-          <a:p>
-            <a:pPr algn="just" marL="0" indent="0" lvl="0">
-              <a:lnSpc>
-                <a:spcPts val="1863"/>
-              </a:lnSpc>
-              <a:spcBef>
-                <a:spcPct val="0"/>
-              </a:spcBef>
-            </a:pPr>
-            <a:r>
-              <a:rPr lang="en-US" sz="1380" spc="82" u="none">
-                <a:solidFill>
-                  <a:srgbClr val="000000"/>
-                </a:solidFill>
-                <a:latin typeface="DM Sans"/>
-                <a:ea typeface="DM Sans"/>
-                <a:cs typeface="DM Sans"/>
-                <a:sym typeface="DM Sans"/>
-              </a:rPr>
-              <a:t>Lorem ipsum dolor sit amet, consectetur adipiscing elit, sed do eiusmod tempor incididunt ut labore et dolore magna aliqua. </a:t>
-            </a:r>
-          </a:p>
+          <a:p/>
         </p:txBody>
       </p:sp>
       <p:sp>
@@ -10265,28 +9202,7 @@
             <a:spAutoFit/>
           </a:bodyPr>
           <a:lstStyle/>
-          <a:p>
-            <a:pPr algn="just" marL="0" indent="0" lvl="0">
-              <a:lnSpc>
-                <a:spcPts val="1863"/>
-              </a:lnSpc>
-              <a:spcBef>
-                <a:spcPct val="0"/>
-              </a:spcBef>
-            </a:pPr>
-            <a:r>
-              <a:rPr lang="en-US" sz="1380" spc="82" u="none">
-                <a:solidFill>
-                  <a:srgbClr val="000000"/>
-                </a:solidFill>
-                <a:latin typeface="DM Sans"/>
-                <a:ea typeface="DM Sans"/>
-                <a:cs typeface="DM Sans"/>
-                <a:sym typeface="DM Sans"/>
-              </a:rPr>
-              <a:t>Lorem ipsum dolor sit amet, consectetur adipiscing elit, sed do eiusmod tempor incididunt ut labore et dolore magna aliqua. </a:t>
-            </a:r>
-          </a:p>
+          <a:p/>
         </p:txBody>
       </p:sp>
       <p:sp>
@@ -10309,25 +9225,7 @@
             <a:spAutoFit/>
           </a:bodyPr>
           <a:lstStyle/>
-          <a:p>
-            <a:pPr algn="l">
-              <a:lnSpc>
-                <a:spcPts val="11281"/>
-              </a:lnSpc>
-            </a:pPr>
-            <a:r>
-              <a:rPr lang="en-US" b="true" sz="11630">
-                <a:solidFill>
-                  <a:srgbClr val="1C2120"/>
-                </a:solidFill>
-                <a:latin typeface="Poppins Bold"/>
-                <a:ea typeface="Poppins Bold"/>
-                <a:cs typeface="Poppins Bold"/>
-                <a:sym typeface="Poppins Bold"/>
-              </a:rPr>
-              <a:t>W</a:t>
-            </a:r>
-          </a:p>
+          <a:p/>
         </p:txBody>
       </p:sp>
       <p:sp>
@@ -10350,25 +9248,7 @@
             <a:spAutoFit/>
           </a:bodyPr>
           <a:lstStyle/>
-          <a:p>
-            <a:pPr algn="l">
-              <a:lnSpc>
-                <a:spcPts val="11281"/>
-              </a:lnSpc>
-            </a:pPr>
-            <a:r>
-              <a:rPr lang="en-US" b="true" sz="11630">
-                <a:solidFill>
-                  <a:srgbClr val="1C2120"/>
-                </a:solidFill>
-                <a:latin typeface="Poppins Bold"/>
-                <a:ea typeface="Poppins Bold"/>
-                <a:cs typeface="Poppins Bold"/>
-                <a:sym typeface="Poppins Bold"/>
-              </a:rPr>
-              <a:t>O</a:t>
-            </a:r>
-          </a:p>
+          <a:p/>
         </p:txBody>
       </p:sp>
       <p:sp>
@@ -10391,25 +9271,7 @@
             <a:spAutoFit/>
           </a:bodyPr>
           <a:lstStyle/>
-          <a:p>
-            <a:pPr algn="l">
-              <a:lnSpc>
-                <a:spcPts val="11281"/>
-              </a:lnSpc>
-            </a:pPr>
-            <a:r>
-              <a:rPr lang="en-US" b="true" sz="11630">
-                <a:solidFill>
-                  <a:srgbClr val="1C2120"/>
-                </a:solidFill>
-                <a:latin typeface="Poppins Bold"/>
-                <a:ea typeface="Poppins Bold"/>
-                <a:cs typeface="Poppins Bold"/>
-                <a:sym typeface="Poppins Bold"/>
-              </a:rPr>
-              <a:t>T</a:t>
-            </a:r>
-          </a:p>
+          <a:p/>
         </p:txBody>
       </p:sp>
     </p:spTree>
